--- a/ゲーム科2年/00_前期/ゲーム開発Ⅰ/04_staticクラス.pptx
+++ b/ゲーム科2年/00_前期/ゲーム開発Ⅰ/04_staticクラス.pptx
@@ -262,7 +262,7 @@
           <a:p>
             <a:fld id="{E9CC885B-4903-4D54-9A93-00025F12DED9}" type="datetimeFigureOut">
               <a:rPr kumimoji="1" lang="ja-JP" altLang="en-US" smtClean="0"/>
-              <a:t>2024/9/30</a:t>
+              <a:t>2025/1/6</a:t>
             </a:fld>
             <a:endParaRPr kumimoji="1" lang="ja-JP" altLang="en-US"/>
           </a:p>
@@ -492,7 +492,7 @@
           <a:p>
             <a:fld id="{E9CC885B-4903-4D54-9A93-00025F12DED9}" type="datetimeFigureOut">
               <a:rPr kumimoji="1" lang="ja-JP" altLang="en-US" smtClean="0"/>
-              <a:t>2024/9/30</a:t>
+              <a:t>2025/1/6</a:t>
             </a:fld>
             <a:endParaRPr kumimoji="1" lang="ja-JP" altLang="en-US"/>
           </a:p>
@@ -732,7 +732,7 @@
           <a:p>
             <a:fld id="{E9CC885B-4903-4D54-9A93-00025F12DED9}" type="datetimeFigureOut">
               <a:rPr kumimoji="1" lang="ja-JP" altLang="en-US" smtClean="0"/>
-              <a:t>2024/9/30</a:t>
+              <a:t>2025/1/6</a:t>
             </a:fld>
             <a:endParaRPr kumimoji="1" lang="ja-JP" altLang="en-US"/>
           </a:p>
@@ -962,7 +962,7 @@
           <a:p>
             <a:fld id="{E9CC885B-4903-4D54-9A93-00025F12DED9}" type="datetimeFigureOut">
               <a:rPr kumimoji="1" lang="ja-JP" altLang="en-US" smtClean="0"/>
-              <a:t>2024/9/30</a:t>
+              <a:t>2025/1/6</a:t>
             </a:fld>
             <a:endParaRPr kumimoji="1" lang="ja-JP" altLang="en-US"/>
           </a:p>
@@ -1237,7 +1237,7 @@
           <a:p>
             <a:fld id="{E9CC885B-4903-4D54-9A93-00025F12DED9}" type="datetimeFigureOut">
               <a:rPr kumimoji="1" lang="ja-JP" altLang="en-US" smtClean="0"/>
-              <a:t>2024/9/30</a:t>
+              <a:t>2025/1/6</a:t>
             </a:fld>
             <a:endParaRPr kumimoji="1" lang="ja-JP" altLang="en-US"/>
           </a:p>
@@ -1566,7 +1566,7 @@
           <a:p>
             <a:fld id="{E9CC885B-4903-4D54-9A93-00025F12DED9}" type="datetimeFigureOut">
               <a:rPr kumimoji="1" lang="ja-JP" altLang="en-US" smtClean="0"/>
-              <a:t>2024/9/30</a:t>
+              <a:t>2025/1/6</a:t>
             </a:fld>
             <a:endParaRPr kumimoji="1" lang="ja-JP" altLang="en-US"/>
           </a:p>
@@ -2042,7 +2042,7 @@
           <a:p>
             <a:fld id="{E9CC885B-4903-4D54-9A93-00025F12DED9}" type="datetimeFigureOut">
               <a:rPr kumimoji="1" lang="ja-JP" altLang="en-US" smtClean="0"/>
-              <a:t>2024/9/30</a:t>
+              <a:t>2025/1/6</a:t>
             </a:fld>
             <a:endParaRPr kumimoji="1" lang="ja-JP" altLang="en-US"/>
           </a:p>
@@ -2183,7 +2183,7 @@
           <a:p>
             <a:fld id="{E9CC885B-4903-4D54-9A93-00025F12DED9}" type="datetimeFigureOut">
               <a:rPr kumimoji="1" lang="ja-JP" altLang="en-US" smtClean="0"/>
-              <a:t>2024/9/30</a:t>
+              <a:t>2025/1/6</a:t>
             </a:fld>
             <a:endParaRPr kumimoji="1" lang="ja-JP" altLang="en-US"/>
           </a:p>
@@ -2296,7 +2296,7 @@
           <a:p>
             <a:fld id="{E9CC885B-4903-4D54-9A93-00025F12DED9}" type="datetimeFigureOut">
               <a:rPr kumimoji="1" lang="ja-JP" altLang="en-US" smtClean="0"/>
-              <a:t>2024/9/30</a:t>
+              <a:t>2025/1/6</a:t>
             </a:fld>
             <a:endParaRPr kumimoji="1" lang="ja-JP" altLang="en-US"/>
           </a:p>
@@ -2639,7 +2639,7 @@
           <a:p>
             <a:fld id="{E9CC885B-4903-4D54-9A93-00025F12DED9}" type="datetimeFigureOut">
               <a:rPr kumimoji="1" lang="ja-JP" altLang="en-US" smtClean="0"/>
-              <a:t>2024/9/30</a:t>
+              <a:t>2025/1/6</a:t>
             </a:fld>
             <a:endParaRPr kumimoji="1" lang="ja-JP" altLang="en-US"/>
           </a:p>
@@ -2927,7 +2927,7 @@
           <a:p>
             <a:fld id="{E9CC885B-4903-4D54-9A93-00025F12DED9}" type="datetimeFigureOut">
               <a:rPr kumimoji="1" lang="ja-JP" altLang="en-US" smtClean="0"/>
-              <a:t>2024/9/30</a:t>
+              <a:t>2025/1/6</a:t>
             </a:fld>
             <a:endParaRPr kumimoji="1" lang="ja-JP" altLang="en-US"/>
           </a:p>
@@ -3200,7 +3200,7 @@
           <a:p>
             <a:fld id="{E9CC885B-4903-4D54-9A93-00025F12DED9}" type="datetimeFigureOut">
               <a:rPr kumimoji="1" lang="ja-JP" altLang="en-US" smtClean="0"/>
-              <a:t>2024/9/30</a:t>
+              <a:t>2025/1/6</a:t>
             </a:fld>
             <a:endParaRPr kumimoji="1" lang="ja-JP" altLang="en-US"/>
           </a:p>
@@ -3712,14 +3712,50 @@
           <a:p>
             <a:r>
               <a:rPr lang="ja-JP" altLang="en-US" sz="2400" dirty="0"/>
-              <a:t>ただし、ゲームを作っていると、入力システムや、計算処理など、</a:t>
+              <a:t>ただし、ゲームを作っていると、</a:t>
+            </a:r>
+            <a:r>
+              <a:rPr lang="ja-JP" altLang="en-US" sz="2400" b="1" dirty="0">
+                <a:solidFill>
+                  <a:srgbClr val="0070C0"/>
+                </a:solidFill>
+              </a:rPr>
+              <a:t>入力システム</a:t>
+            </a:r>
+            <a:r>
+              <a:rPr lang="ja-JP" altLang="en-US" sz="2400" dirty="0"/>
+              <a:t>や、</a:t>
+            </a:r>
+            <a:r>
+              <a:rPr lang="ja-JP" altLang="en-US" sz="2400" b="1" dirty="0">
+                <a:solidFill>
+                  <a:srgbClr val="0070C0"/>
+                </a:solidFill>
+              </a:rPr>
+              <a:t>計算処理</a:t>
+            </a:r>
+            <a:r>
+              <a:rPr lang="ja-JP" altLang="en-US" sz="2400" dirty="0"/>
+              <a:t>など、</a:t>
             </a:r>
             <a:endParaRPr lang="en-US" altLang="ja-JP" sz="2400" dirty="0"/>
           </a:p>
           <a:p>
             <a:r>
               <a:rPr lang="ja-JP" altLang="en-US" sz="2400" dirty="0"/>
-              <a:t>物体の無い機能的なものを使うことがあります。</a:t>
+              <a:t>物体の無い</a:t>
+            </a:r>
+            <a:r>
+              <a:rPr lang="ja-JP" altLang="en-US" sz="2400" b="1" dirty="0">
+                <a:solidFill>
+                  <a:srgbClr val="0070C0"/>
+                </a:solidFill>
+              </a:rPr>
+              <a:t>機能的なもの</a:t>
+            </a:r>
+            <a:r>
+              <a:rPr lang="ja-JP" altLang="en-US" sz="2400" dirty="0"/>
+              <a:t>を使うことがあります。</a:t>
             </a:r>
             <a:endParaRPr lang="en-US" altLang="ja-JP" sz="2400" dirty="0"/>
           </a:p>
